--- a/fsad final review.pptx
+++ b/fsad final review.pptx
@@ -5,7 +5,7 @@
     <p:sldMasterId id="2147483648" r:id="rId1"/>
   </p:sldMasterIdLst>
   <p:sldIdLst>
-    <p:sldId id="256" r:id="rId2"/>
+    <p:sldId id="280" r:id="rId2"/>
     <p:sldId id="271" r:id="rId3"/>
     <p:sldId id="272" r:id="rId4"/>
     <p:sldId id="259" r:id="rId5"/>
@@ -341,7 +341,7 @@
             <a:fld id="{1D8BD707-D9CF-40AE-B4C6-C98DA3205C09}" type="datetimeFigureOut">
               <a:rPr lang="en-US" smtClean="0"/>
               <a:pPr/>
-              <a:t>5/5/2026</a:t>
+              <a:t>5/6/2026</a:t>
             </a:fld>
             <a:endParaRPr lang="en-US"/>
           </a:p>
@@ -506,7 +506,7 @@
             <a:fld id="{1D8BD707-D9CF-40AE-B4C6-C98DA3205C09}" type="datetimeFigureOut">
               <a:rPr lang="en-US" smtClean="0"/>
               <a:pPr/>
-              <a:t>5/5/2026</a:t>
+              <a:t>5/6/2026</a:t>
             </a:fld>
             <a:endParaRPr lang="en-US"/>
           </a:p>
@@ -681,7 +681,7 @@
             <a:fld id="{1D8BD707-D9CF-40AE-B4C6-C98DA3205C09}" type="datetimeFigureOut">
               <a:rPr lang="en-US" smtClean="0"/>
               <a:pPr/>
-              <a:t>5/5/2026</a:t>
+              <a:t>5/6/2026</a:t>
             </a:fld>
             <a:endParaRPr lang="en-US"/>
           </a:p>
@@ -846,7 +846,7 @@
             <a:fld id="{1D8BD707-D9CF-40AE-B4C6-C98DA3205C09}" type="datetimeFigureOut">
               <a:rPr lang="en-US" smtClean="0"/>
               <a:pPr/>
-              <a:t>5/5/2026</a:t>
+              <a:t>5/6/2026</a:t>
             </a:fld>
             <a:endParaRPr lang="en-US"/>
           </a:p>
@@ -1088,7 +1088,7 @@
             <a:fld id="{1D8BD707-D9CF-40AE-B4C6-C98DA3205C09}" type="datetimeFigureOut">
               <a:rPr lang="en-US" smtClean="0"/>
               <a:pPr/>
-              <a:t>5/5/2026</a:t>
+              <a:t>5/6/2026</a:t>
             </a:fld>
             <a:endParaRPr lang="en-US"/>
           </a:p>
@@ -1370,7 +1370,7 @@
             <a:fld id="{1D8BD707-D9CF-40AE-B4C6-C98DA3205C09}" type="datetimeFigureOut">
               <a:rPr lang="en-US" smtClean="0"/>
               <a:pPr/>
-              <a:t>5/5/2026</a:t>
+              <a:t>5/6/2026</a:t>
             </a:fld>
             <a:endParaRPr lang="en-US"/>
           </a:p>
@@ -1786,7 +1786,7 @@
             <a:fld id="{1D8BD707-D9CF-40AE-B4C6-C98DA3205C09}" type="datetimeFigureOut">
               <a:rPr lang="en-US" smtClean="0"/>
               <a:pPr/>
-              <a:t>5/5/2026</a:t>
+              <a:t>5/6/2026</a:t>
             </a:fld>
             <a:endParaRPr lang="en-US"/>
           </a:p>
@@ -1900,7 +1900,7 @@
             <a:fld id="{1D8BD707-D9CF-40AE-B4C6-C98DA3205C09}" type="datetimeFigureOut">
               <a:rPr lang="en-US" smtClean="0"/>
               <a:pPr/>
-              <a:t>5/5/2026</a:t>
+              <a:t>5/6/2026</a:t>
             </a:fld>
             <a:endParaRPr lang="en-US"/>
           </a:p>
@@ -1992,7 +1992,7 @@
             <a:fld id="{1D8BD707-D9CF-40AE-B4C6-C98DA3205C09}" type="datetimeFigureOut">
               <a:rPr lang="en-US" smtClean="0"/>
               <a:pPr/>
-              <a:t>5/5/2026</a:t>
+              <a:t>5/6/2026</a:t>
             </a:fld>
             <a:endParaRPr lang="en-US"/>
           </a:p>
@@ -2264,7 +2264,7 @@
             <a:fld id="{1D8BD707-D9CF-40AE-B4C6-C98DA3205C09}" type="datetimeFigureOut">
               <a:rPr lang="en-US" smtClean="0"/>
               <a:pPr/>
-              <a:t>5/5/2026</a:t>
+              <a:t>5/6/2026</a:t>
             </a:fld>
             <a:endParaRPr lang="en-US"/>
           </a:p>
@@ -2513,7 +2513,7 @@
             <a:fld id="{1D8BD707-D9CF-40AE-B4C6-C98DA3205C09}" type="datetimeFigureOut">
               <a:rPr lang="en-US" smtClean="0"/>
               <a:pPr/>
-              <a:t>5/5/2026</a:t>
+              <a:t>5/6/2026</a:t>
             </a:fld>
             <a:endParaRPr lang="en-US"/>
           </a:p>
@@ -2721,7 +2721,7 @@
             <a:fld id="{1D8BD707-D9CF-40AE-B4C6-C98DA3205C09}" type="datetimeFigureOut">
               <a:rPr lang="en-US" smtClean="0"/>
               <a:pPr/>
-              <a:t>5/5/2026</a:t>
+              <a:t>5/6/2026</a:t>
             </a:fld>
             <a:endParaRPr lang="en-US"/>
           </a:p>
@@ -3078,14 +3078,6 @@
 <file path=ppt/slides/slide1.xml><?xml version="1.0" encoding="utf-8"?>
 <p:sld xmlns:a="http://schemas.openxmlformats.org/drawingml/2006/main" xmlns:r="http://schemas.openxmlformats.org/officeDocument/2006/relationships" xmlns:p="http://schemas.openxmlformats.org/presentationml/2006/main">
   <p:cSld>
-    <p:bg>
-      <p:bgPr>
-        <a:solidFill>
-          <a:srgbClr val="FFFFFE"/>
-        </a:solidFill>
-        <a:effectLst/>
-      </p:bgPr>
-    </p:bg>
     <p:spTree>
       <p:nvGrpSpPr>
         <p:cNvPr id="1" name=""/>
@@ -3100,6 +3092,206 @@
           <a:chExt cx="0" cy="0"/>
         </a:xfrm>
       </p:grpSpPr>
+      <p:grpSp>
+        <p:nvGrpSpPr>
+          <p:cNvPr id="10" name="Group 10"/>
+          <p:cNvGrpSpPr/>
+          <p:nvPr/>
+        </p:nvGrpSpPr>
+        <p:grpSpPr>
+          <a:xfrm>
+            <a:off x="11762088" y="-9632634"/>
+            <a:ext cx="10994424" cy="10994424"/>
+            <a:chOff x="0" y="0"/>
+            <a:chExt cx="812800" cy="812800"/>
+          </a:xfrm>
+        </p:grpSpPr>
+        <p:sp>
+          <p:nvSpPr>
+            <p:cNvPr id="11" name="Freeform 11"/>
+            <p:cNvSpPr/>
+            <p:nvPr/>
+          </p:nvSpPr>
+          <p:spPr>
+            <a:xfrm>
+              <a:off x="0" y="0"/>
+              <a:ext cx="812800" cy="812800"/>
+            </a:xfrm>
+            <a:custGeom>
+              <a:avLst/>
+              <a:gdLst/>
+              <a:ahLst/>
+              <a:cxnLst/>
+              <a:rect l="l" t="t" r="r" b="b"/>
+              <a:pathLst>
+                <a:path w="812800" h="812800">
+                  <a:moveTo>
+                    <a:pt x="406400" y="0"/>
+                  </a:moveTo>
+                  <a:cubicBezTo>
+                    <a:pt x="181951" y="0"/>
+                    <a:pt x="0" y="181951"/>
+                    <a:pt x="0" y="406400"/>
+                  </a:cubicBezTo>
+                  <a:cubicBezTo>
+                    <a:pt x="0" y="630849"/>
+                    <a:pt x="181951" y="812800"/>
+                    <a:pt x="406400" y="812800"/>
+                  </a:cubicBezTo>
+                  <a:cubicBezTo>
+                    <a:pt x="630849" y="812800"/>
+                    <a:pt x="812800" y="630849"/>
+                    <a:pt x="812800" y="406400"/>
+                  </a:cubicBezTo>
+                  <a:cubicBezTo>
+                    <a:pt x="812800" y="181951"/>
+                    <a:pt x="630849" y="0"/>
+                    <a:pt x="406400" y="0"/>
+                  </a:cubicBezTo>
+                  <a:close/>
+                </a:path>
+              </a:pathLst>
+            </a:custGeom>
+            <a:ln w="514350" cap="sq">
+              <a:solidFill>
+                <a:srgbClr val="FD6220">
+                  <a:alpha val="11765"/>
+                </a:srgbClr>
+              </a:solidFill>
+              <a:prstDash val="solid"/>
+              <a:miter/>
+            </a:ln>
+          </p:spPr>
+        </p:sp>
+        <p:sp>
+          <p:nvSpPr>
+            <p:cNvPr id="12" name="TextBox 12"/>
+            <p:cNvSpPr txBox="1"/>
+            <p:nvPr/>
+          </p:nvSpPr>
+          <p:spPr>
+            <a:xfrm>
+              <a:off x="76200" y="47625"/>
+              <a:ext cx="660400" cy="688975"/>
+            </a:xfrm>
+            <a:prstGeom prst="rect">
+              <a:avLst/>
+            </a:prstGeom>
+          </p:spPr>
+          <p:txBody>
+            <a:bodyPr lIns="50800" tIns="50800" rIns="50800" bIns="50800" rtlCol="0" anchor="ctr"/>
+            <a:lstStyle/>
+            <a:p>
+              <a:pPr algn="ctr">
+                <a:lnSpc>
+                  <a:spcPts val="2659"/>
+                </a:lnSpc>
+              </a:pPr>
+              <a:endParaRPr/>
+            </a:p>
+          </p:txBody>
+        </p:sp>
+      </p:grpSp>
+      <p:grpSp>
+        <p:nvGrpSpPr>
+          <p:cNvPr id="19" name="Group 19"/>
+          <p:cNvGrpSpPr/>
+          <p:nvPr/>
+        </p:nvGrpSpPr>
+        <p:grpSpPr>
+          <a:xfrm>
+            <a:off x="-9965724" y="-1383136"/>
+            <a:ext cx="10994424" cy="10994424"/>
+            <a:chOff x="0" y="0"/>
+            <a:chExt cx="812800" cy="812800"/>
+          </a:xfrm>
+        </p:grpSpPr>
+        <p:sp>
+          <p:nvSpPr>
+            <p:cNvPr id="20" name="Freeform 20"/>
+            <p:cNvSpPr/>
+            <p:nvPr/>
+          </p:nvSpPr>
+          <p:spPr>
+            <a:xfrm>
+              <a:off x="0" y="0"/>
+              <a:ext cx="812800" cy="812800"/>
+            </a:xfrm>
+            <a:custGeom>
+              <a:avLst/>
+              <a:gdLst/>
+              <a:ahLst/>
+              <a:cxnLst/>
+              <a:rect l="l" t="t" r="r" b="b"/>
+              <a:pathLst>
+                <a:path w="812800" h="812800">
+                  <a:moveTo>
+                    <a:pt x="406400" y="0"/>
+                  </a:moveTo>
+                  <a:cubicBezTo>
+                    <a:pt x="181951" y="0"/>
+                    <a:pt x="0" y="181951"/>
+                    <a:pt x="0" y="406400"/>
+                  </a:cubicBezTo>
+                  <a:cubicBezTo>
+                    <a:pt x="0" y="630849"/>
+                    <a:pt x="181951" y="812800"/>
+                    <a:pt x="406400" y="812800"/>
+                  </a:cubicBezTo>
+                  <a:cubicBezTo>
+                    <a:pt x="630849" y="812800"/>
+                    <a:pt x="812800" y="630849"/>
+                    <a:pt x="812800" y="406400"/>
+                  </a:cubicBezTo>
+                  <a:cubicBezTo>
+                    <a:pt x="812800" y="181951"/>
+                    <a:pt x="630849" y="0"/>
+                    <a:pt x="406400" y="0"/>
+                  </a:cubicBezTo>
+                  <a:close/>
+                </a:path>
+              </a:pathLst>
+            </a:custGeom>
+            <a:ln w="514350" cap="sq">
+              <a:solidFill>
+                <a:srgbClr val="FD6220">
+                  <a:alpha val="11765"/>
+                </a:srgbClr>
+              </a:solidFill>
+              <a:prstDash val="solid"/>
+              <a:miter/>
+            </a:ln>
+          </p:spPr>
+        </p:sp>
+        <p:sp>
+          <p:nvSpPr>
+            <p:cNvPr id="21" name="TextBox 21"/>
+            <p:cNvSpPr txBox="1"/>
+            <p:nvPr/>
+          </p:nvSpPr>
+          <p:spPr>
+            <a:xfrm>
+              <a:off x="76200" y="47625"/>
+              <a:ext cx="660400" cy="688975"/>
+            </a:xfrm>
+            <a:prstGeom prst="rect">
+              <a:avLst/>
+            </a:prstGeom>
+          </p:spPr>
+          <p:txBody>
+            <a:bodyPr lIns="50800" tIns="50800" rIns="50800" bIns="50800" rtlCol="0" anchor="ctr"/>
+            <a:lstStyle/>
+            <a:p>
+              <a:pPr algn="ctr">
+                <a:lnSpc>
+                  <a:spcPts val="2659"/>
+                </a:lnSpc>
+              </a:pPr>
+              <a:endParaRPr/>
+            </a:p>
+          </p:txBody>
+        </p:sp>
+      </p:grpSp>
       <p:pic>
         <p:nvPicPr>
           <p:cNvPr id="23" name="Picture 22">
@@ -3122,8 +3314,8 @@
         </p:blipFill>
         <p:spPr>
           <a:xfrm>
-            <a:off x="6610443" y="196689"/>
-            <a:ext cx="4752247" cy="1360611"/>
+            <a:off x="6799772" y="16492"/>
+            <a:ext cx="4131816" cy="1784622"/>
           </a:xfrm>
           <a:prstGeom prst="rect">
             <a:avLst/>
@@ -3229,7 +3421,7 @@
                 </a:solidFill>
                 <a:latin typeface="Bookman Old Style" panose="02050604050505020204" pitchFamily="18" charset="0"/>
               </a:rPr>
-              <a:t>10211CS224 / FULL STACK APPLICATION DEVELOPMENT </a:t>
+              <a:t>10211CS224 / FULL STACK APPLICATION DEVELOPMENT (JAVA)</a:t>
             </a:r>
             <a:endParaRPr lang="en-IN" sz="2800" b="1" dirty="0">
               <a:solidFill>
@@ -3277,7 +3469,7 @@
                 <a:latin typeface="Arial" panose="020B0604020202020204" pitchFamily="34" charset="0"/>
                 <a:cs typeface="Arial" panose="020B0604020202020204" pitchFamily="34" charset="0"/>
               </a:rPr>
-              <a:t>PROJECT REVIEW : MILESTONE PROJECT – 2</a:t>
+              <a:t>END SEMESTER PROJECT REVIEW</a:t>
             </a:r>
           </a:p>
           <a:p>
@@ -3300,25 +3492,8 @@
                 <a:latin typeface="Arial" panose="020B0604020202020204" pitchFamily="34" charset="0"/>
                 <a:cs typeface="Arial" panose="020B0604020202020204" pitchFamily="34" charset="0"/>
               </a:rPr>
-              <a:t>Date</a:t>
+              <a:t>Date: 06-05-2026</a:t>
             </a:r>
-            <a:r>
-              <a:rPr lang="en-IN" sz="3600" b="1">
-                <a:solidFill>
-                  <a:srgbClr val="C00000"/>
-                </a:solidFill>
-                <a:latin typeface="Arial" panose="020B0604020202020204" pitchFamily="34" charset="0"/>
-                <a:cs typeface="Arial" panose="020B0604020202020204" pitchFamily="34" charset="0"/>
-              </a:rPr>
-              <a:t>: 6-05-2026</a:t>
-            </a:r>
-            <a:endParaRPr lang="en-IN" sz="3600" b="1" dirty="0">
-              <a:solidFill>
-                <a:srgbClr val="C00000"/>
-              </a:solidFill>
-              <a:latin typeface="Arial" panose="020B0604020202020204" pitchFamily="34" charset="0"/>
-              <a:cs typeface="Arial" panose="020B0604020202020204" pitchFamily="34" charset="0"/>
-            </a:endParaRPr>
           </a:p>
         </p:txBody>
       </p:sp>
@@ -3336,8 +3511,8 @@
         </p:nvSpPr>
         <p:spPr>
           <a:xfrm>
-            <a:off x="1692835" y="5854393"/>
-            <a:ext cx="15784162" cy="600164"/>
+            <a:off x="1501640" y="6057900"/>
+            <a:ext cx="15784162" cy="1092607"/>
           </a:xfrm>
           <a:prstGeom prst="rect">
             <a:avLst/>
@@ -3352,7 +3527,7 @@
           <a:p>
             <a:pPr algn="ctr"/>
             <a:r>
-              <a:rPr lang="en-US" sz="3300" b="1" dirty="0">
+              <a:rPr lang="en-US" sz="3200" b="1" dirty="0">
                 <a:solidFill>
                   <a:srgbClr val="00B0F0"/>
                 </a:solidFill>
@@ -3361,9 +3536,19 @@
               </a:rPr>
               <a:t>React JS based Web application for Ticket Booking</a:t>
             </a:r>
-            <a:endParaRPr lang="en-IN" sz="3300" b="1" dirty="0">
+            <a:endParaRPr lang="en-IN" sz="3200" b="1" dirty="0">
               <a:solidFill>
                 <a:srgbClr val="00B0F0"/>
+              </a:solidFill>
+              <a:latin typeface="Times New Roman" panose="02020603050405020304" pitchFamily="18" charset="0"/>
+              <a:cs typeface="Times New Roman" panose="02020603050405020304" pitchFamily="18" charset="0"/>
+            </a:endParaRPr>
+          </a:p>
+          <a:p>
+            <a:pPr algn="ctr"/>
+            <a:endParaRPr lang="en-IN" sz="3200" b="1" dirty="0">
+              <a:solidFill>
+                <a:srgbClr val="0033CC"/>
               </a:solidFill>
               <a:latin typeface="Times New Roman" panose="02020603050405020304" pitchFamily="18" charset="0"/>
               <a:cs typeface="Times New Roman" panose="02020603050405020304" pitchFamily="18" charset="0"/>
@@ -3386,7 +3571,7 @@
         <p:spPr>
           <a:xfrm>
             <a:off x="893870" y="7800539"/>
-            <a:ext cx="9067800" cy="1391663"/>
+            <a:ext cx="9067800" cy="2084160"/>
           </a:xfrm>
           <a:prstGeom prst="rect">
             <a:avLst/>
@@ -3406,9 +3591,8 @@
             </a:pPr>
             <a:r>
               <a:rPr lang="en-US" sz="3000" b="1" dirty="0">
-                <a:latin typeface="Times New Roman" panose="02020603050405020304" pitchFamily="18" charset="0"/>
+                <a:latin typeface="Cambria" panose="02040503050406030204" pitchFamily="18" charset="0"/>
                 <a:ea typeface="Cambria" panose="02040503050406030204" pitchFamily="18" charset="0"/>
-                <a:cs typeface="Times New Roman" panose="02020603050405020304" pitchFamily="18" charset="0"/>
               </a:rPr>
               <a:t>Presented By:</a:t>
             </a:r>
@@ -3433,6 +3617,17 @@
               <a:cs typeface="Times New Roman" panose="02020603050405020304" pitchFamily="18" charset="0"/>
             </a:endParaRPr>
           </a:p>
+          <a:p>
+            <a:pPr>
+              <a:lnSpc>
+                <a:spcPct val="150000"/>
+              </a:lnSpc>
+            </a:pPr>
+            <a:endParaRPr lang="en-IN" sz="3000" dirty="0">
+              <a:latin typeface="Cambria" panose="02040503050406030204" pitchFamily="18" charset="0"/>
+              <a:ea typeface="Cambria" panose="02040503050406030204" pitchFamily="18" charset="0"/>
+            </a:endParaRPr>
+          </a:p>
         </p:txBody>
       </p:sp>
       <p:sp>
@@ -3449,8 +3644,8 @@
         </p:nvSpPr>
         <p:spPr>
           <a:xfrm>
-            <a:off x="10945035" y="7818586"/>
-            <a:ext cx="6914603" cy="1391663"/>
+            <a:off x="11460744" y="7776745"/>
+            <a:ext cx="6914603" cy="699166"/>
           </a:xfrm>
           <a:prstGeom prst="rect">
             <a:avLst/>
@@ -3475,24 +3670,6 @@
               </a:rPr>
               <a:t>Courses Handling Faculty:</a:t>
             </a:r>
-          </a:p>
-          <a:p>
-            <a:pPr>
-              <a:lnSpc>
-                <a:spcPct val="150000"/>
-              </a:lnSpc>
-            </a:pPr>
-            <a:r>
-              <a:rPr lang="en-US" sz="3000" dirty="0">
-                <a:latin typeface="Cambria" panose="02040503050406030204" pitchFamily="18" charset="0"/>
-                <a:ea typeface="Cambria" panose="02040503050406030204" pitchFamily="18" charset="0"/>
-              </a:rPr>
-              <a:t>Dr. S . HEMAMALINI – M.E., Ph.D.,</a:t>
-            </a:r>
-            <a:endParaRPr lang="en-IN" sz="3000" dirty="0">
-              <a:latin typeface="Cambria" panose="02040503050406030204" pitchFamily="18" charset="0"/>
-              <a:ea typeface="Cambria" panose="02040503050406030204" pitchFamily="18" charset="0"/>
-            </a:endParaRPr>
           </a:p>
         </p:txBody>
       </p:sp>
@@ -3511,7 +3688,7 @@
         <p:spPr>
           <a:xfrm>
             <a:off x="2209800" y="6972300"/>
-            <a:ext cx="14743170" cy="523220"/>
+            <a:ext cx="14743170" cy="400110"/>
           </a:xfrm>
           <a:prstGeom prst="rect">
             <a:avLst/>
@@ -3525,18 +3702,75 @@
           <a:lstStyle/>
           <a:p>
             <a:r>
-              <a:rPr lang="en-US" sz="2800" b="1" dirty="0">
-                <a:latin typeface="Times New Roman" panose="02020603050405020304" pitchFamily="18" charset="0"/>
+              <a:rPr lang="en-US" sz="2000" b="1" dirty="0">
+                <a:latin typeface="Cambria" panose="02040503050406030204" pitchFamily="18" charset="0"/>
                 <a:ea typeface="Cambria" panose="02040503050406030204" pitchFamily="18" charset="0"/>
-                <a:cs typeface="Times New Roman" panose="02020603050405020304" pitchFamily="18" charset="0"/>
               </a:rPr>
-              <a:t>SDG: 4 –  Quality Education</a:t>
+              <a:t>SDG: 9 – (Industry ,Innovation,&amp; Infrastructure) &amp; 12( </a:t>
             </a:r>
-            <a:endParaRPr lang="en-IN" sz="2800" b="1" dirty="0">
-              <a:latin typeface="Times New Roman" panose="02020603050405020304" pitchFamily="18" charset="0"/>
+            <a:r>
+              <a:rPr lang="en-US" sz="2000" b="1" dirty="0" err="1">
+                <a:latin typeface="Cambria" panose="02040503050406030204" pitchFamily="18" charset="0"/>
+                <a:ea typeface="Cambria" panose="02040503050406030204" pitchFamily="18" charset="0"/>
+              </a:rPr>
+              <a:t>Resposible</a:t>
+            </a:r>
+            <a:r>
+              <a:rPr lang="en-US" sz="2000" b="1" dirty="0">
+                <a:latin typeface="Cambria" panose="02040503050406030204" pitchFamily="18" charset="0"/>
+                <a:ea typeface="Cambria" panose="02040503050406030204" pitchFamily="18" charset="0"/>
+              </a:rPr>
+              <a:t> Consumption and Production)</a:t>
+            </a:r>
+            <a:endParaRPr lang="en-IN" sz="2000" b="1" dirty="0">
+              <a:latin typeface="Cambria" panose="02040503050406030204" pitchFamily="18" charset="0"/>
               <a:ea typeface="Cambria" panose="02040503050406030204" pitchFamily="18" charset="0"/>
-              <a:cs typeface="Times New Roman" panose="02020603050405020304" pitchFamily="18" charset="0"/>
             </a:endParaRPr>
+          </a:p>
+        </p:txBody>
+      </p:sp>
+      <p:sp>
+        <p:nvSpPr>
+          <p:cNvPr id="2" name="TextBox 1">
+            <a:extLst>
+              <a:ext uri="{FF2B5EF4-FFF2-40B4-BE49-F238E27FC236}">
+                <a16:creationId xmlns:a16="http://schemas.microsoft.com/office/drawing/2014/main" id="{4BDCED85-7E3F-D9F6-6B3D-19260E377E20}"/>
+              </a:ext>
+            </a:extLst>
+          </p:cNvPr>
+          <p:cNvSpPr txBox="1"/>
+          <p:nvPr/>
+        </p:nvSpPr>
+        <p:spPr>
+          <a:xfrm>
+            <a:off x="11460744" y="8678518"/>
+            <a:ext cx="5227056" cy="954107"/>
+          </a:xfrm>
+          <a:prstGeom prst="rect">
+            <a:avLst/>
+          </a:prstGeom>
+          <a:noFill/>
+        </p:spPr>
+        <p:txBody>
+          <a:bodyPr wrap="square" rtlCol="0">
+            <a:spAutoFit/>
+          </a:bodyPr>
+          <a:lstStyle/>
+          <a:p>
+            <a:r>
+              <a:rPr lang="en-US" sz="2800" dirty="0">
+                <a:latin typeface="Cambria" panose="02040503050406030204" pitchFamily="18" charset="0"/>
+                <a:ea typeface="Cambria" panose="02040503050406030204" pitchFamily="18" charset="0"/>
+              </a:rPr>
+              <a:t>Dr. S . HEMAMALINI – M.E., Ph.D.,</a:t>
+            </a:r>
+            <a:endParaRPr lang="en-IN" sz="2800" dirty="0">
+              <a:latin typeface="Cambria" panose="02040503050406030204" pitchFamily="18" charset="0"/>
+              <a:ea typeface="Cambria" panose="02040503050406030204" pitchFamily="18" charset="0"/>
+            </a:endParaRPr>
+          </a:p>
+          <a:p>
+            <a:endParaRPr lang="en-IN" sz="2800" dirty="0"/>
           </a:p>
         </p:txBody>
       </p:sp>
